--- a/curso/pptx/S03.pptx
+++ b/curso/pptx/S03.pptx
@@ -4233,7 +4233,7 @@
                 </a:solidFill>
                 <a:latin typeface="Nunito Sans"/>
               </a:rPr>
-              <a:t>奥马尔非常确信：“钥匙在书包里。”结果不在。最后在厨房的桌子上找到了。</a:t>
+              <a:t>一个男孩非常确信：“钥匙在书包里。”结果不在。最后在厨房的桌子上找到了。</a:t>
             </a:r>
           </a:p>
         </p:txBody>
@@ -4542,7 +4542,7 @@
                 </a:solidFill>
                 <a:latin typeface="Nunito Sans"/>
               </a:rPr>
-              <a:t>艾托尔（Aitor）没有复习。在一道选择题上，他随便选了b）……结果对了。</a:t>
+              <a:t>一个男孩没有复习。在一道选择题上，他随便选了b）……结果对了。</a:t>
             </a:r>
           </a:p>
         </p:txBody>
@@ -4851,7 +4851,7 @@
                 </a:solidFill>
                 <a:latin typeface="Nunito Sans"/>
               </a:rPr>
-              <a:t>奈亚拉（Naiara）说：“在海平面上，水在100度时沸腾。”这是课上讲过的，她还在实验室里亲自测量过。</a:t>
+              <a:t>一个女孩说：“在海平面上，水在100度时沸腾。”这是课上讲过的，她还在实验室里亲自测量过。</a:t>
             </a:r>
           </a:p>
         </p:txBody>
@@ -4949,7 +4949,7 @@
                 </a:solidFill>
                 <a:latin typeface="Nunito Sans"/>
               </a:rPr>
-              <a:t>结论：奈亚拉知道。它是真的，而且有好的理由。</a:t>
+              <a:t>结论：这个女孩知道。它是真的，而且有好的理由。</a:t>
             </a:r>
           </a:p>
         </p:txBody>
@@ -5135,7 +5135,7 @@
                 </a:solidFill>
                 <a:latin typeface="Nunito Sans"/>
               </a:rPr>
-              <a:t>莱雷（Leire）看走廊里的钟：指着10:15。现在正是10:15。可是这个钟从昨天10:15起就停了。</a:t>
+              <a:t>一个女孩看走廊里的钟：指着10:15。现在正是10:15。可是这个钟从昨天10:15起就停了。</a:t>
             </a:r>
           </a:p>
         </p:txBody>
@@ -5183,7 +5183,7 @@
                 </a:solidFill>
                 <a:latin typeface="Nunito Sans"/>
               </a:rPr>
-              <a:t>莱雷知道现在几点吗？</a:t>
+              <a:t>这个女孩知道现在几点吗？</a:t>
             </a:r>
           </a:p>
           <a:p>
@@ -6718,7 +6718,7 @@
                 </a:solidFill>
                 <a:latin typeface="Nunito Sans"/>
               </a:rPr>
-              <a:t>奥马尔（Omar）非常确信自己把钥匙放在了书包里。他去找……却没有。</a:t>
+              <a:t>一个男孩非常确信自己把钥匙放在了书包里。他去找……却没有。</a:t>
             </a:r>
           </a:p>
         </p:txBody>
@@ -6757,7 +6757,7 @@
                 </a:solidFill>
                 <a:latin typeface="Nunito Sans"/>
               </a:rPr>
-              <a:t>奥马尔是知道钥匙在哪里，还是只是相信？</a:t>
+              <a:t>这个男孩是知道钥匙在哪里，还是只是相信？</a:t>
             </a:r>
           </a:p>
         </p:txBody>
